--- a/dist/초1/국어/대화와문학/초1_국어_대화와문학_02_동시읽고느낌말하기.pptx
+++ b/dist/초1/국어/대화와문학/초1_국어_대화와문학_02_동시읽고느낌말하기.pptx
@@ -120,19 +120,19 @@
   <p:extLst>
     <p:ext uri="{521415D9-36F7-43E2-AB2F-B90AF26B5E84}">
       <p14:sectionLst xmlns:p14="http://schemas.microsoft.com/office/powerpoint/2010/main">
-        <p14:section name="도입" id="{63a33d2b-cb72-7745-f3e1-f6b790fc1f31}">
+        <p14:section name="도입" id="{514271c5-f1bf-9492-f70e-dadf8c327db9}">
           <p14:sldIdLst>
             <p14:sldId id="256"/>
             <p14:sldId id="257"/>
           </p14:sldIdLst>
         </p14:section>
-        <p14:section name="개념" id="{fe50075f-5b75-a122-b8db-eb4bedb19097}">
+        <p14:section name="개념" id="{55cadb23-4bb0-55c8-f6f9-2217d18a48a8}">
           <p14:sldIdLst>
             <p14:sldId id="258"/>
             <p14:sldId id="259"/>
           </p14:sldIdLst>
         </p14:section>
-        <p14:section name="연습" id="{828a3bb5-72ed-761f-1569-13aba08978a2}">
+        <p14:section name="연습" id="{4818a253-cff3-5853-fa20-c009d26c136a}">
           <p14:sldIdLst>
             <p14:sldId id="260"/>
             <p14:sldId id="261"/>
@@ -141,19 +141,19 @@
             <p14:sldId id="264"/>
           </p14:sldIdLst>
         </p14:section>
-        <p14:section name="확인" id="{4564a7fc-982a-6b92-ed0f-53d57c8526d7}">
+        <p14:section name="확인" id="{ec76538c-7216-423f-1545-57d4a936e6fc}">
           <p14:sldIdLst>
             <p14:sldId id="265"/>
             <p14:sldId id="266"/>
             <p14:sldId id="267"/>
           </p14:sldIdLst>
         </p14:section>
-        <p14:section name="정리" id="{01f6733d-f672-2d66-6d5f-597c572c22b1}">
+        <p14:section name="정리" id="{83963fdd-a072-1194-04c4-32e16c6dbbc8}">
           <p14:sldIdLst>
             <p14:sldId id="268"/>
           </p14:sldIdLst>
         </p14:section>
-        <p14:section name="보충" id="{a641be22-e1be-d9d1-dac1-1c1b70c95560}">
+        <p14:section name="보충" id="{fe9fafcb-af83-990a-28a9-df46e884b267}">
           <p14:sldIdLst>
             <p14:sldId id="269"/>
           </p14:sldIdLst>

--- a/dist/초1/국어/대화와문학/초1_국어_대화와문학_02_동시읽고느낌말하기.pptx
+++ b/dist/초1/국어/대화와문학/초1_국어_대화와문학_02_동시읽고느낌말하기.pptx
@@ -120,19 +120,19 @@
   <p:extLst>
     <p:ext uri="{521415D9-36F7-43E2-AB2F-B90AF26B5E84}">
       <p14:sectionLst xmlns:p14="http://schemas.microsoft.com/office/powerpoint/2010/main">
-        <p14:section name="도입" id="{514271c5-f1bf-9492-f70e-dadf8c327db9}">
+        <p14:section name="도입" id="{5e84dec2-1241-a9ea-7a63-7d70214d829f}">
           <p14:sldIdLst>
             <p14:sldId id="256"/>
             <p14:sldId id="257"/>
           </p14:sldIdLst>
         </p14:section>
-        <p14:section name="개념" id="{55cadb23-4bb0-55c8-f6f9-2217d18a48a8}">
+        <p14:section name="개념" id="{06ed754e-e3ea-be1f-9bc6-103e46d75531}">
           <p14:sldIdLst>
             <p14:sldId id="258"/>
             <p14:sldId id="259"/>
           </p14:sldIdLst>
         </p14:section>
-        <p14:section name="연습" id="{4818a253-cff3-5853-fa20-c009d26c136a}">
+        <p14:section name="연습" id="{37a754d0-753c-49e2-53d6-c2fc5ddf31bf}">
           <p14:sldIdLst>
             <p14:sldId id="260"/>
             <p14:sldId id="261"/>
@@ -141,19 +141,19 @@
             <p14:sldId id="264"/>
           </p14:sldIdLst>
         </p14:section>
-        <p14:section name="확인" id="{ec76538c-7216-423f-1545-57d4a936e6fc}">
+        <p14:section name="확인" id="{076482ae-415a-ec82-f90a-7d20e01d4245}">
           <p14:sldIdLst>
             <p14:sldId id="265"/>
             <p14:sldId id="266"/>
             <p14:sldId id="267"/>
           </p14:sldIdLst>
         </p14:section>
-        <p14:section name="정리" id="{83963fdd-a072-1194-04c4-32e16c6dbbc8}">
+        <p14:section name="정리" id="{6c2ad972-06fb-e334-9134-15c085cafecc}">
           <p14:sldIdLst>
             <p14:sldId id="268"/>
           </p14:sldIdLst>
         </p14:section>
-        <p14:section name="보충" id="{fe9fafcb-af83-990a-28a9-df46e884b267}">
+        <p14:section name="보충" id="{ce40d96f-2af9-f262-c685-256449d8fcc5}">
           <p14:sldIdLst>
             <p14:sldId id="269"/>
           </p14:sldIdLst>
@@ -2937,7 +2937,7 @@
               <a:buNone/>
             </a:pPr>
             <a:r>
-              <a:rPr lang="ko-KR" altLang="en-US" sz="5000" b="1" dirty="0">
+              <a:rPr lang="ko-KR" altLang="en-US" sz="4800" b="1" dirty="0">
                 <a:solidFill>
                   <a:srgbClr val="FFFFFF"/>
                 </a:solidFill>
